--- a/classes/parte-5-explotacion-de-sistemas-y-binarios/132-ida-pro-y-radare2/clase-132-presentacion.pptx
+++ b/classes/parte-5-explotacion-de-sistemas-y-binarios/132-ida-pro-y-radare2/clase-132-presentacion.pptx
@@ -17,6 +17,8 @@
     <p:sldId id="265" r:id="rId16"/>
     <p:sldId id="266" r:id="rId17"/>
     <p:sldId id="267" r:id="rId18"/>
+    <p:sldId id="268" r:id="rId19"/>
+    <p:sldId id="269" r:id="rId20"/>
   </p:sldIdLst>
   <p:sldSz cx="9144000" cy="6858000" type="screen4x3"/>
   <p:notesSz cx="6858000" cy="9144000"/>
@@ -3198,7 +3200,7 @@
                   <a:srgbClr val="0B3D2E"/>
                 </a:solidFill>
               </a:rPr>
-              <a:t>⚠️ Errores comunes</a:t>
+              <a:t>📝 Reto verificable</a:t>
             </a:r>
           </a:p>
         </p:txBody>
@@ -3236,67 +3238,37 @@
                   <a:srgbClr val="22282E"/>
                 </a:solidFill>
               </a:rPr>
-              <a:t>•  afl vacío — No corriste el análisis; usa -A o aaa</a:t>
-            </a:r>
-          </a:p>
-          <a:p>
-            <a:pPr>
-              <a:spcAft>
-                <a:spcPts val="600"/>
-              </a:spcAft>
-            </a:pPr>
-            <a:r>
-              <a:rPr sz="1500">
-                <a:solidFill>
-                  <a:srgbClr val="22282E"/>
-                </a:solidFill>
-              </a:rPr>
-              <a:t>•  Te pierdes en r2 — Empieza con ? y V/VV; ve incrementando comandos</a:t>
-            </a:r>
-          </a:p>
-          <a:p>
-            <a:pPr>
-              <a:spcAft>
-                <a:spcPts val="600"/>
-              </a:spcAft>
-            </a:pPr>
-            <a:r>
-              <a:rPr sz="1500">
-                <a:solidFill>
-                  <a:srgbClr val="22282E"/>
-                </a:solidFill>
-              </a:rPr>
-              <a:t>•  pseudo-C de r2 pobre — Usa Cutter/Ghidra para decompilar; r2 brilla en control fino</a:t>
-            </a:r>
-          </a:p>
-          <a:p>
-            <a:pPr>
-              <a:spcAft>
-                <a:spcPts val="600"/>
-              </a:spcAft>
-            </a:pPr>
-            <a:r>
-              <a:rPr sz="1500">
-                <a:solidFill>
-                  <a:srgbClr val="22282E"/>
-                </a:solidFill>
-              </a:rPr>
-              <a:t>•  IDA Free no decompila esa arch — Hex-Rays por arquitectura es limitado en Free</a:t>
-            </a:r>
-          </a:p>
-          <a:p>
-            <a:pPr>
-              <a:spcAft>
-                <a:spcPts val="600"/>
-              </a:spcAft>
-            </a:pPr>
-            <a:r>
-              <a:rPr sz="1500">
-                <a:solidFill>
-                  <a:srgbClr val="22282E"/>
-                </a:solidFill>
-              </a:rPr>
-              <a:t>•  Cambios no persisten — Guarda el proyecto (Ps) o la base de IDA (.idb)</a:t>
+              <a:t>•  Analiza un crackme con radare2 (sin GUI) y deduce la clave válida usando solo comandos de r2.</a:t>
+            </a:r>
+          </a:p>
+          <a:p>
+            <a:pPr>
+              <a:spcAft>
+                <a:spcPts val="600"/>
+              </a:spcAft>
+            </a:pPr>
+            <a:r>
+              <a:rPr sz="1500">
+                <a:solidFill>
+                  <a:srgbClr val="22282E"/>
+                </a:solidFill>
+              </a:rPr>
+              <a:t>•  Criterio de aceptación: obtienes la clave correcta trabajando desde la consola de r2 y documentas</a:t>
+            </a:r>
+          </a:p>
+          <a:p>
+            <a:pPr>
+              <a:spcAft>
+                <a:spcPts val="600"/>
+              </a:spcAft>
+            </a:pPr>
+            <a:r>
+              <a:rPr sz="1500">
+                <a:solidFill>
+                  <a:srgbClr val="22282E"/>
+                </a:solidFill>
+              </a:rPr>
+              <a:t>•  los comandos usados (afl, pdf, izz, axt, etc.).</a:t>
             </a:r>
           </a:p>
         </p:txBody>
@@ -3347,7 +3319,7 @@
                   <a:srgbClr val="0B3D2E"/>
                 </a:solidFill>
               </a:rPr>
-              <a:t>❓ Preguntas frecuentes</a:t>
+              <a:t>⚠️ Errores comunes</a:t>
             </a:r>
           </a:p>
         </p:txBody>
@@ -3385,82 +3357,67 @@
                   <a:srgbClr val="22282E"/>
                 </a:solidFill>
               </a:rPr>
-              <a:t>•  ❓ ¿Cuál aprendo primero? Ghidra (gratis, decompilador) para entender; r2 para control y scripting;</a:t>
-            </a:r>
-          </a:p>
-          <a:p>
-            <a:pPr>
-              <a:spcAft>
-                <a:spcPts val="600"/>
-              </a:spcAft>
-            </a:pPr>
-            <a:r>
-              <a:rPr sz="1500">
-                <a:solidFill>
-                  <a:srgbClr val="22282E"/>
-                </a:solidFill>
-              </a:rPr>
-              <a:t>•  IDA si tu entorno lo usa.</a:t>
-            </a:r>
-          </a:p>
-          <a:p>
-            <a:pPr>
-              <a:spcAft>
-                <a:spcPts val="600"/>
-              </a:spcAft>
-            </a:pPr>
-            <a:r>
-              <a:rPr sz="1500">
-                <a:solidFill>
-                  <a:srgbClr val="22282E"/>
-                </a:solidFill>
-              </a:rPr>
-              <a:t>•  ❓ ¿radare2 o rizin? rizin es un fork más estable con Cutter integrado; los comandos son casi</a:t>
-            </a:r>
-          </a:p>
-          <a:p>
-            <a:pPr>
-              <a:spcAft>
-                <a:spcPts val="600"/>
-              </a:spcAft>
-            </a:pPr>
-            <a:r>
-              <a:rPr sz="1500">
-                <a:solidFill>
-                  <a:srgbClr val="22282E"/>
-                </a:solidFill>
-              </a:rPr>
-              <a:t>•  idénticos.</a:t>
-            </a:r>
-          </a:p>
-          <a:p>
-            <a:pPr>
-              <a:spcAft>
-                <a:spcPts val="600"/>
-              </a:spcAft>
-            </a:pPr>
-            <a:r>
-              <a:rPr sz="1500">
-                <a:solidFill>
-                  <a:srgbClr val="22282E"/>
-                </a:solidFill>
-              </a:rPr>
-              <a:t>•  ❓ ¿Puedo combinar herramientas? Sí: es común triage con r2, decompilar con Ghidra/IDA y depurar con</a:t>
-            </a:r>
-          </a:p>
-          <a:p>
-            <a:pPr>
-              <a:spcAft>
-                <a:spcPts val="600"/>
-              </a:spcAft>
-            </a:pPr>
-            <a:r>
-              <a:rPr sz="1500">
-                <a:solidFill>
-                  <a:srgbClr val="22282E"/>
-                </a:solidFill>
-              </a:rPr>
-              <a:t>•  GDB.</a:t>
+              <a:t>•  afl vacío — No corriste el análisis; usa -A o aaa</a:t>
+            </a:r>
+          </a:p>
+          <a:p>
+            <a:pPr>
+              <a:spcAft>
+                <a:spcPts val="600"/>
+              </a:spcAft>
+            </a:pPr>
+            <a:r>
+              <a:rPr sz="1500">
+                <a:solidFill>
+                  <a:srgbClr val="22282E"/>
+                </a:solidFill>
+              </a:rPr>
+              <a:t>•  Te pierdes en r2 — Empieza con ? y V/VV; ve incrementando comandos</a:t>
+            </a:r>
+          </a:p>
+          <a:p>
+            <a:pPr>
+              <a:spcAft>
+                <a:spcPts val="600"/>
+              </a:spcAft>
+            </a:pPr>
+            <a:r>
+              <a:rPr sz="1500">
+                <a:solidFill>
+                  <a:srgbClr val="22282E"/>
+                </a:solidFill>
+              </a:rPr>
+              <a:t>•  pseudo-C de r2 pobre — Usa Cutter/Ghidra para decompilar; r2 brilla en control fino</a:t>
+            </a:r>
+          </a:p>
+          <a:p>
+            <a:pPr>
+              <a:spcAft>
+                <a:spcPts val="600"/>
+              </a:spcAft>
+            </a:pPr>
+            <a:r>
+              <a:rPr sz="1500">
+                <a:solidFill>
+                  <a:srgbClr val="22282E"/>
+                </a:solidFill>
+              </a:rPr>
+              <a:t>•  IDA Free no decompila esa arch — Hex-Rays por arquitectura es limitado en Free</a:t>
+            </a:r>
+          </a:p>
+          <a:p>
+            <a:pPr>
+              <a:spcAft>
+                <a:spcPts val="600"/>
+              </a:spcAft>
+            </a:pPr>
+            <a:r>
+              <a:rPr sz="1500">
+                <a:solidFill>
+                  <a:srgbClr val="22282E"/>
+                </a:solidFill>
+              </a:rPr>
+              <a:t>•  Cambios no persisten — Guarda el proyecto (Ps) o la base de IDA (.idb)</a:t>
             </a:r>
           </a:p>
         </p:txBody>
@@ -3511,7 +3468,7 @@
                   <a:srgbClr val="0B3D2E"/>
                 </a:solidFill>
               </a:rPr>
-              <a:t>🔗 Referencias</a:t>
+              <a:t>❓ Preguntas frecuentes</a:t>
             </a:r>
           </a:p>
         </p:txBody>
@@ -3549,6 +3506,170 @@
                   <a:srgbClr val="22282E"/>
                 </a:solidFill>
               </a:rPr>
+              <a:t>•  ❓ ¿Cuál aprendo primero? Ghidra (gratis, decompilador) para entender; r2 para control y scripting;</a:t>
+            </a:r>
+          </a:p>
+          <a:p>
+            <a:pPr>
+              <a:spcAft>
+                <a:spcPts val="600"/>
+              </a:spcAft>
+            </a:pPr>
+            <a:r>
+              <a:rPr sz="1500">
+                <a:solidFill>
+                  <a:srgbClr val="22282E"/>
+                </a:solidFill>
+              </a:rPr>
+              <a:t>•  IDA si tu entorno lo usa.</a:t>
+            </a:r>
+          </a:p>
+          <a:p>
+            <a:pPr>
+              <a:spcAft>
+                <a:spcPts val="600"/>
+              </a:spcAft>
+            </a:pPr>
+            <a:r>
+              <a:rPr sz="1500">
+                <a:solidFill>
+                  <a:srgbClr val="22282E"/>
+                </a:solidFill>
+              </a:rPr>
+              <a:t>•  ❓ ¿radare2 o rizin? rizin es un fork más estable con Cutter integrado; los comandos son casi</a:t>
+            </a:r>
+          </a:p>
+          <a:p>
+            <a:pPr>
+              <a:spcAft>
+                <a:spcPts val="600"/>
+              </a:spcAft>
+            </a:pPr>
+            <a:r>
+              <a:rPr sz="1500">
+                <a:solidFill>
+                  <a:srgbClr val="22282E"/>
+                </a:solidFill>
+              </a:rPr>
+              <a:t>•  idénticos.</a:t>
+            </a:r>
+          </a:p>
+          <a:p>
+            <a:pPr>
+              <a:spcAft>
+                <a:spcPts val="600"/>
+              </a:spcAft>
+            </a:pPr>
+            <a:r>
+              <a:rPr sz="1500">
+                <a:solidFill>
+                  <a:srgbClr val="22282E"/>
+                </a:solidFill>
+              </a:rPr>
+              <a:t>•  ❓ ¿Puedo combinar herramientas? Sí: es común triage con r2, decompilar con Ghidra/IDA y depurar con</a:t>
+            </a:r>
+          </a:p>
+          <a:p>
+            <a:pPr>
+              <a:spcAft>
+                <a:spcPts val="600"/>
+              </a:spcAft>
+            </a:pPr>
+            <a:r>
+              <a:rPr sz="1500">
+                <a:solidFill>
+                  <a:srgbClr val="22282E"/>
+                </a:solidFill>
+              </a:rPr>
+              <a:t>•  GDB.</a:t>
+            </a:r>
+          </a:p>
+        </p:txBody>
+      </p:sp>
+    </p:spTree>
+  </p:cSld>
+  <p:clrMapOvr>
+    <a:masterClrMapping/>
+  </p:clrMapOvr>
+</p:sld>
+</file>
+
+<file path=ppt/slides/slide13.xml><?xml version="1.0" encoding="utf-8"?>
+<p:sld xmlns:a="http://schemas.openxmlformats.org/drawingml/2006/main" xmlns:p="http://schemas.openxmlformats.org/presentationml/2006/main" xmlns:r="http://schemas.openxmlformats.org/officeDocument/2006/relationships">
+  <p:cSld>
+    <p:spTree>
+      <p:nvGrpSpPr>
+        <p:cNvPr id="1" name=""/>
+        <p:cNvGrpSpPr/>
+        <p:nvPr/>
+      </p:nvGrpSpPr>
+      <p:grpSpPr/>
+      <p:sp>
+        <p:nvSpPr>
+          <p:cNvPr id="2" name="TextBox 1"/>
+          <p:cNvSpPr txBox="1"/>
+          <p:nvPr/>
+        </p:nvSpPr>
+        <p:spPr>
+          <a:xfrm>
+            <a:off x="457200" y="320040"/>
+            <a:ext cx="8229600" cy="822960"/>
+          </a:xfrm>
+          <a:prstGeom prst="rect">
+            <a:avLst/>
+          </a:prstGeom>
+          <a:noFill/>
+        </p:spPr>
+        <p:txBody>
+          <a:bodyPr wrap="square">
+            <a:spAutoFit/>
+          </a:bodyPr>
+          <a:lstStyle/>
+          <a:p>
+            <a:r>
+              <a:rPr sz="2600" b="1">
+                <a:solidFill>
+                  <a:srgbClr val="0B3D2E"/>
+                </a:solidFill>
+              </a:rPr>
+              <a:t>🔗 Referencias</a:t>
+            </a:r>
+          </a:p>
+        </p:txBody>
+      </p:sp>
+      <p:sp>
+        <p:nvSpPr>
+          <p:cNvPr id="3" name="TextBox 2"/>
+          <p:cNvSpPr txBox="1"/>
+          <p:nvPr/>
+        </p:nvSpPr>
+        <p:spPr>
+          <a:xfrm>
+            <a:off x="457200" y="1280160"/>
+            <a:ext cx="8229600" cy="4937760"/>
+          </a:xfrm>
+          <a:prstGeom prst="rect">
+            <a:avLst/>
+          </a:prstGeom>
+          <a:noFill/>
+        </p:spPr>
+        <p:txBody>
+          <a:bodyPr wrap="square">
+            <a:spAutoFit/>
+          </a:bodyPr>
+          <a:lstStyle/>
+          <a:p>
+            <a:pPr>
+              <a:spcAft>
+                <a:spcPts val="600"/>
+              </a:spcAft>
+            </a:pPr>
+            <a:r>
+              <a:rPr sz="1500">
+                <a:solidFill>
+                  <a:srgbClr val="22282E"/>
+                </a:solidFill>
+              </a:rPr>
               <a:t>•  Eagle, C. The IDA Pro Book, 2e. No Starch Press.</a:t>
             </a:r>
           </a:p>
@@ -3599,6 +3720,81 @@
           </a:p>
         </p:txBody>
       </p:sp>
+    </p:spTree>
+  </p:cSld>
+  <p:clrMapOvr>
+    <a:masterClrMapping/>
+  </p:clrMapOvr>
+</p:sld>
+</file>
+
+<file path=ppt/slides/slide14.xml><?xml version="1.0" encoding="utf-8"?>
+<p:sld xmlns:a="http://schemas.openxmlformats.org/drawingml/2006/main" xmlns:p="http://schemas.openxmlformats.org/presentationml/2006/main" xmlns:r="http://schemas.openxmlformats.org/officeDocument/2006/relationships">
+  <p:cSld>
+    <p:spTree>
+      <p:nvGrpSpPr>
+        <p:cNvPr id="1" name=""/>
+        <p:cNvGrpSpPr/>
+        <p:nvPr/>
+      </p:nvGrpSpPr>
+      <p:grpSpPr/>
+      <p:sp>
+        <p:nvSpPr>
+          <p:cNvPr id="2" name="TextBox 1"/>
+          <p:cNvSpPr txBox="1"/>
+          <p:nvPr/>
+        </p:nvSpPr>
+        <p:spPr>
+          <a:xfrm>
+            <a:off x="457200" y="274320"/>
+            <a:ext cx="8229600" cy="640080"/>
+          </a:xfrm>
+          <a:prstGeom prst="rect">
+            <a:avLst/>
+          </a:prstGeom>
+          <a:noFill/>
+        </p:spPr>
+        <p:txBody>
+          <a:bodyPr wrap="square">
+            <a:spAutoFit/>
+          </a:bodyPr>
+          <a:lstStyle/>
+          <a:p>
+            <a:r>
+              <a:rPr sz="2200" b="1">
+                <a:solidFill>
+                  <a:srgbClr val="0B3D2E"/>
+                </a:solidFill>
+              </a:rPr>
+              <a:t>Diagrama de la clase</a:t>
+            </a:r>
+          </a:p>
+        </p:txBody>
+      </p:sp>
+      <p:pic>
+        <p:nvPicPr>
+          <p:cNvPr id="3" name="Picture 2" descr="44918c720371ceaf.png"/>
+          <p:cNvPicPr>
+            <a:picLocks noChangeAspect="1"/>
+          </p:cNvPicPr>
+          <p:nvPr/>
+        </p:nvPicPr>
+        <p:blipFill>
+          <a:blip r:embed="rId2"/>
+          <a:stretch>
+            <a:fillRect/>
+          </a:stretch>
+        </p:blipFill>
+        <p:spPr>
+          <a:xfrm>
+            <a:off x="457200" y="2125387"/>
+            <a:ext cx="8229600" cy="3247305"/>
+          </a:xfrm>
+          <a:prstGeom prst="rect">
+            <a:avLst/>
+          </a:prstGeom>
+        </p:spPr>
+      </p:pic>
     </p:spTree>
   </p:cSld>
   <p:clrMapOvr>
@@ -4107,7 +4303,7 @@
                   <a:srgbClr val="0B3D2E"/>
                 </a:solidFill>
               </a:rPr>
-              <a:t>📖 Definiciones y características</a:t>
+              <a:t>🧠 Explicación en profundidad</a:t>
             </a:r>
           </a:p>
         </p:txBody>
@@ -4145,97 +4341,97 @@
                   <a:srgbClr val="22282E"/>
                 </a:solidFill>
               </a:rPr>
-              <a:t>•  IDA Pro: desensamblador/decompilador comercial líder. Clave: Hex-Rays produce pseudo-C de alta</a:t>
-            </a:r>
-          </a:p>
-          <a:p>
-            <a:pPr>
-              <a:spcAft>
-                <a:spcPts val="600"/>
-              </a:spcAft>
-            </a:pPr>
-            <a:r>
-              <a:rPr sz="1500">
-                <a:solidFill>
-                  <a:srgbClr val="22282E"/>
-                </a:solidFill>
-              </a:rPr>
-              <a:t>•  calidad; existe IDA Free con capacidades limitadas.</a:t>
-            </a:r>
-          </a:p>
-          <a:p>
-            <a:pPr>
-              <a:spcAft>
-                <a:spcPts val="600"/>
-              </a:spcAft>
-            </a:pPr>
-            <a:r>
-              <a:rPr sz="1500">
-                <a:solidFill>
-                  <a:srgbClr val="22282E"/>
-                </a:solidFill>
-              </a:rPr>
-              <a:t>•  radare2 / rizin: framework libre orientado a comandos. Clave: curva pronunciada pero muy potente</a:t>
-            </a:r>
-          </a:p>
-          <a:p>
-            <a:pPr>
-              <a:spcAft>
-                <a:spcPts val="600"/>
-              </a:spcAft>
-            </a:pPr>
-            <a:r>
-              <a:rPr sz="1500">
-                <a:solidFill>
-                  <a:srgbClr val="22282E"/>
-                </a:solidFill>
-              </a:rPr>
-              <a:t>•  y scriptable; rizin es un fork con Cutter.</a:t>
-            </a:r>
-          </a:p>
-          <a:p>
-            <a:pPr>
-              <a:spcAft>
-                <a:spcPts val="600"/>
-              </a:spcAft>
-            </a:pPr>
-            <a:r>
-              <a:rPr sz="1500">
-                <a:solidFill>
-                  <a:srgbClr val="22282E"/>
-                </a:solidFill>
-              </a:rPr>
-              <a:t>•  Cutter: GUI para radare2/rizin. Clave: facilita la transición desde IDA/Ghidra.</a:t>
-            </a:r>
-          </a:p>
-          <a:p>
-            <a:pPr>
-              <a:spcAft>
-                <a:spcPts val="600"/>
-              </a:spcAft>
-            </a:pPr>
-            <a:r>
-              <a:rPr sz="1500">
-                <a:solidFill>
-                  <a:srgbClr val="22282E"/>
-                </a:solidFill>
-              </a:rPr>
-              <a:t>•  Grafo de control de flujo (CFG): representación visual de bloques y saltos. Clave: IDA y r2</a:t>
-            </a:r>
-          </a:p>
-          <a:p>
-            <a:pPr>
-              <a:spcAft>
-                <a:spcPts val="600"/>
-              </a:spcAft>
-            </a:pPr>
-            <a:r>
-              <a:rPr sz="1500">
-                <a:solidFill>
-                  <a:srgbClr val="22282E"/>
-                </a:solidFill>
-              </a:rPr>
-              <a:t>•  (VV) lo muestran para entender la lógica.</a:t>
+              <a:t>•  Ghidra no es la única herramienta de RE, y conocer el ecosistema completo hace al analista más</a:t>
+            </a:r>
+          </a:p>
+          <a:p>
+            <a:pPr>
+              <a:spcAft>
+                <a:spcPts val="600"/>
+              </a:spcAft>
+            </a:pPr>
+            <a:r>
+              <a:rPr sz="1500">
+                <a:solidFill>
+                  <a:srgbClr val="22282E"/>
+                </a:solidFill>
+              </a:rPr>
+              <a:t>•  versátil. IDA Pro es el desensamblador comercial que fue durante décadas el estándar de la</a:t>
+            </a:r>
+          </a:p>
+          <a:p>
+            <a:pPr>
+              <a:spcAft>
+                <a:spcPts val="600"/>
+              </a:spcAft>
+            </a:pPr>
+            <a:r>
+              <a:rPr sz="1500">
+                <a:solidFill>
+                  <a:srgbClr val="22282E"/>
+                </a:solidFill>
+              </a:rPr>
+              <a:t>•  industria: su decompilador Hex-Rays es referencia por su calidad, su análisis es muy maduro y su</a:t>
+            </a:r>
+          </a:p>
+          <a:p>
+            <a:pPr>
+              <a:spcAft>
+                <a:spcPts val="600"/>
+              </a:spcAft>
+            </a:pPr>
+            <a:r>
+              <a:rPr sz="1500">
+                <a:solidFill>
+                  <a:srgbClr val="22282E"/>
+                </a:solidFill>
+              </a:rPr>
+              <a:t>•  ecosistema de plugins es enorme. Su inconveniente es el precio (caro, aunque existe una versión</a:t>
+            </a:r>
+          </a:p>
+          <a:p>
+            <a:pPr>
+              <a:spcAft>
+                <a:spcPts val="600"/>
+              </a:spcAft>
+            </a:pPr>
+            <a:r>
+              <a:rPr sz="1500">
+                <a:solidFill>
+                  <a:srgbClr val="22282E"/>
+                </a:solidFill>
+              </a:rPr>
+              <a:t>•  gratuita limitada), razón por la que Ghidra ganó tanta tracción. radare2 (y su sucesor rizin) es</a:t>
+            </a:r>
+          </a:p>
+          <a:p>
+            <a:pPr>
+              <a:spcAft>
+                <a:spcPts val="600"/>
+              </a:spcAft>
+            </a:pPr>
+            <a:r>
+              <a:rPr sz="1500">
+                <a:solidFill>
+                  <a:srgbClr val="22282E"/>
+                </a:solidFill>
+              </a:rPr>
+              <a:t>•  el extremo opuesto: una suite de RE libre, ligera y basada en línea de comandos, extraordinariamente</a:t>
+            </a:r>
+          </a:p>
+          <a:p>
+            <a:pPr>
+              <a:spcAft>
+                <a:spcPts val="600"/>
+              </a:spcAft>
+            </a:pPr>
+            <a:r>
+              <a:rPr sz="1500">
+                <a:solidFill>
+                  <a:srgbClr val="22282E"/>
+                </a:solidFill>
+              </a:rPr>
+              <a:t>•  potente pero con una curva de aprendizaje pronunciada por su modelo de comandos denso. Los tres</a:t>
             </a:r>
           </a:p>
         </p:txBody>
@@ -4286,7 +4482,7 @@
                   <a:srgbClr val="0B3D2E"/>
                 </a:solidFill>
               </a:rPr>
-              <a:t>🧰 Herramientas y preparación</a:t>
+              <a:t>📖 Definiciones y características</a:t>
             </a:r>
           </a:p>
         </p:txBody>
@@ -4324,22 +4520,97 @@
                   <a:srgbClr val="22282E"/>
                 </a:solidFill>
               </a:rPr>
-              <a:t>•  git clone https://github.com/radareorg/radare2 &amp;&amp; radare2/sys/install.sh</a:t>
-            </a:r>
-          </a:p>
-          <a:p>
-            <a:pPr>
-              <a:spcAft>
-                <a:spcPts val="600"/>
-              </a:spcAft>
-            </a:pPr>
-            <a:r>
-              <a:rPr sz="1500">
-                <a:solidFill>
-                  <a:srgbClr val="22282E"/>
-                </a:solidFill>
-              </a:rPr>
-              <a:t>•  pip install r2pipe</a:t>
+              <a:t>•  IDA Pro: desensamblador/decompilador comercial líder. Clave: Hex-Rays produce pseudo-C de alta</a:t>
+            </a:r>
+          </a:p>
+          <a:p>
+            <a:pPr>
+              <a:spcAft>
+                <a:spcPts val="600"/>
+              </a:spcAft>
+            </a:pPr>
+            <a:r>
+              <a:rPr sz="1500">
+                <a:solidFill>
+                  <a:srgbClr val="22282E"/>
+                </a:solidFill>
+              </a:rPr>
+              <a:t>•  calidad; existe IDA Free con capacidades limitadas.</a:t>
+            </a:r>
+          </a:p>
+          <a:p>
+            <a:pPr>
+              <a:spcAft>
+                <a:spcPts val="600"/>
+              </a:spcAft>
+            </a:pPr>
+            <a:r>
+              <a:rPr sz="1500">
+                <a:solidFill>
+                  <a:srgbClr val="22282E"/>
+                </a:solidFill>
+              </a:rPr>
+              <a:t>•  radare2 / rizin: framework libre orientado a comandos. Clave: curva pronunciada pero muy potente</a:t>
+            </a:r>
+          </a:p>
+          <a:p>
+            <a:pPr>
+              <a:spcAft>
+                <a:spcPts val="600"/>
+              </a:spcAft>
+            </a:pPr>
+            <a:r>
+              <a:rPr sz="1500">
+                <a:solidFill>
+                  <a:srgbClr val="22282E"/>
+                </a:solidFill>
+              </a:rPr>
+              <a:t>•  y scriptable; rizin es un fork con Cutter.</a:t>
+            </a:r>
+          </a:p>
+          <a:p>
+            <a:pPr>
+              <a:spcAft>
+                <a:spcPts val="600"/>
+              </a:spcAft>
+            </a:pPr>
+            <a:r>
+              <a:rPr sz="1500">
+                <a:solidFill>
+                  <a:srgbClr val="22282E"/>
+                </a:solidFill>
+              </a:rPr>
+              <a:t>•  Cutter: GUI para radare2/rizin. Clave: facilita la transición desde IDA/Ghidra.</a:t>
+            </a:r>
+          </a:p>
+          <a:p>
+            <a:pPr>
+              <a:spcAft>
+                <a:spcPts val="600"/>
+              </a:spcAft>
+            </a:pPr>
+            <a:r>
+              <a:rPr sz="1500">
+                <a:solidFill>
+                  <a:srgbClr val="22282E"/>
+                </a:solidFill>
+              </a:rPr>
+              <a:t>•  Grafo de control de flujo (CFG): representación visual de bloques y saltos. Clave: IDA y r2</a:t>
+            </a:r>
+          </a:p>
+          <a:p>
+            <a:pPr>
+              <a:spcAft>
+                <a:spcPts val="600"/>
+              </a:spcAft>
+            </a:pPr>
+            <a:r>
+              <a:rPr sz="1500">
+                <a:solidFill>
+                  <a:srgbClr val="22282E"/>
+                </a:solidFill>
+              </a:rPr>
+              <a:t>•  (VV) lo muestran para entender la lógica.</a:t>
             </a:r>
           </a:p>
         </p:txBody>
@@ -4390,7 +4661,7 @@
                   <a:srgbClr val="0B3D2E"/>
                 </a:solidFill>
               </a:rPr>
-              <a:t>🧪 Laboratorio guiado</a:t>
+              <a:t>📔 Glosario</a:t>
             </a:r>
           </a:p>
         </p:txBody>
@@ -4428,97 +4699,97 @@
                   <a:srgbClr val="22282E"/>
                 </a:solidFill>
               </a:rPr>
-              <a:t>•  Abre el crackme en radare2 y analiza:</a:t>
-            </a:r>
-          </a:p>
-          <a:p>
-            <a:pPr>
-              <a:spcAft>
-                <a:spcPts val="600"/>
-              </a:spcAft>
-            </a:pPr>
-            <a:r>
-              <a:rPr sz="1500">
-                <a:solidFill>
-                  <a:srgbClr val="22282E"/>
-                </a:solidFill>
-              </a:rPr>
-              <a:t>•  r2 -A ./crackme      # -A ejecuta aaa (análisis)</a:t>
-            </a:r>
-          </a:p>
-          <a:p>
-            <a:pPr>
-              <a:spcAft>
-                <a:spcPts val="600"/>
-              </a:spcAft>
-            </a:pPr>
-            <a:r>
-              <a:rPr sz="1500">
-                <a:solidFill>
-                  <a:srgbClr val="22282E"/>
-                </a:solidFill>
-              </a:rPr>
-              <a:t>•  [0x...]&gt; afl         # lista funciones</a:t>
-            </a:r>
-          </a:p>
-          <a:p>
-            <a:pPr>
-              <a:spcAft>
-                <a:spcPts val="600"/>
-              </a:spcAft>
-            </a:pPr>
-            <a:r>
-              <a:rPr sz="1500">
-                <a:solidFill>
-                  <a:srgbClr val="22282E"/>
-                </a:solidFill>
-              </a:rPr>
-              <a:t>•  [0x...]&gt; s main; pdf # desensambla main</a:t>
-            </a:r>
-          </a:p>
-          <a:p>
-            <a:pPr>
-              <a:spcAft>
-                <a:spcPts val="600"/>
-              </a:spcAft>
-            </a:pPr>
-            <a:r>
-              <a:rPr sz="1500">
-                <a:solidFill>
-                  <a:srgbClr val="22282E"/>
-                </a:solidFill>
-              </a:rPr>
-              <a:t>•  [0x...]&gt; VV @ main   # grafo interactivo (q para salir)</a:t>
-            </a:r>
-          </a:p>
-          <a:p>
-            <a:pPr>
-              <a:spcAft>
-                <a:spcPts val="600"/>
-              </a:spcAft>
-            </a:pPr>
-            <a:r>
-              <a:rPr sz="1500">
-                <a:solidFill>
-                  <a:srgbClr val="22282E"/>
-                </a:solidFill>
-              </a:rPr>
-              <a:t>•  Renombra y comenta en r2:</a:t>
-            </a:r>
-          </a:p>
-          <a:p>
-            <a:pPr>
-              <a:spcAft>
-                <a:spcPts val="600"/>
-              </a:spcAft>
-            </a:pPr>
-            <a:r>
-              <a:rPr sz="1500">
-                <a:solidFill>
-                  <a:srgbClr val="22282E"/>
-                </a:solidFill>
-              </a:rPr>
-              <a:t>•  afvn oldname input     ; renombrar variable</a:t>
+              <a:t>•  Término — Definición concisa</a:t>
+            </a:r>
+          </a:p>
+          <a:p>
+            <a:pPr>
+              <a:spcAft>
+                <a:spcPts val="600"/>
+              </a:spcAft>
+            </a:pPr>
+            <a:r>
+              <a:rPr sz="1500">
+                <a:solidFill>
+                  <a:srgbClr val="22282E"/>
+                </a:solidFill>
+              </a:rPr>
+              <a:t>•  IDA Pro — Desensamblador comercial estándar de la industria</a:t>
+            </a:r>
+          </a:p>
+          <a:p>
+            <a:pPr>
+              <a:spcAft>
+                <a:spcPts val="600"/>
+              </a:spcAft>
+            </a:pPr>
+            <a:r>
+              <a:rPr sz="1500">
+                <a:solidFill>
+                  <a:srgbClr val="22282E"/>
+                </a:solidFill>
+              </a:rPr>
+              <a:t>•  Hex-Rays — Decompilador de IDA, referencia de calidad</a:t>
+            </a:r>
+          </a:p>
+          <a:p>
+            <a:pPr>
+              <a:spcAft>
+                <a:spcPts val="600"/>
+              </a:spcAft>
+            </a:pPr>
+            <a:r>
+              <a:rPr sz="1500">
+                <a:solidFill>
+                  <a:srgbClr val="22282E"/>
+                </a:solidFill>
+              </a:rPr>
+              <a:t>•  radare2 / rizin — Suite de RE libre, ligera y de línea de comandos</a:t>
+            </a:r>
+          </a:p>
+          <a:p>
+            <a:pPr>
+              <a:spcAft>
+                <a:spcPts val="600"/>
+              </a:spcAft>
+            </a:pPr>
+            <a:r>
+              <a:rPr sz="1500">
+                <a:solidFill>
+                  <a:srgbClr val="22282E"/>
+                </a:solidFill>
+              </a:rPr>
+              <a:t>•  Cutter — GUI construida sobre rizin</a:t>
+            </a:r>
+          </a:p>
+          <a:p>
+            <a:pPr>
+              <a:spcAft>
+                <a:spcPts val="600"/>
+              </a:spcAft>
+            </a:pPr>
+            <a:r>
+              <a:rPr sz="1500">
+                <a:solidFill>
+                  <a:srgbClr val="22282E"/>
+                </a:solidFill>
+              </a:rPr>
+              <a:t>•  Vista de grafo — Código como bloques básicos conectados por saltos</a:t>
+            </a:r>
+          </a:p>
+          <a:p>
+            <a:pPr>
+              <a:spcAft>
+                <a:spcPts val="600"/>
+              </a:spcAft>
+            </a:pPr>
+            <a:r>
+              <a:rPr sz="1500">
+                <a:solidFill>
+                  <a:srgbClr val="22282E"/>
+                </a:solidFill>
+              </a:rPr>
+              <a:t>•  Bloque básico — Secuencia de instrucciones sin saltos</a:t>
             </a:r>
           </a:p>
         </p:txBody>
@@ -4569,7 +4840,7 @@
                   <a:srgbClr val="0B3D2E"/>
                 </a:solidFill>
               </a:rPr>
-              <a:t>✍️ Ejercicios</a:t>
+              <a:t>🧪 Laboratorio guiado</a:t>
             </a:r>
           </a:p>
         </p:txBody>
@@ -4607,82 +4878,97 @@
                   <a:srgbClr val="22282E"/>
                 </a:solidFill>
               </a:rPr>
-              <a:t>•  Lista y comenta las diferencias de flujo IDA (GUI) vs r2 (REPL).</a:t>
-            </a:r>
-          </a:p>
-          <a:p>
-            <a:pPr>
-              <a:spcAft>
-                <a:spcPts val="600"/>
-              </a:spcAft>
-            </a:pPr>
-            <a:r>
-              <a:rPr sz="1500">
-                <a:solidFill>
-                  <a:srgbClr val="22282E"/>
-                </a:solidFill>
-              </a:rPr>
-              <a:t>•  Usa pdc (pseudo-decompile) de r2 y compáralo con Hex-Rays.</a:t>
-            </a:r>
-          </a:p>
-          <a:p>
-            <a:pPr>
-              <a:spcAft>
-                <a:spcPts val="600"/>
-              </a:spcAft>
-            </a:pPr>
-            <a:r>
-              <a:rPr sz="1500">
-                <a:solidFill>
-                  <a:srgbClr val="22282E"/>
-                </a:solidFill>
-              </a:rPr>
-              <a:t>•  Renombra tres variables en Cutter y en r2 puro.</a:t>
-            </a:r>
-          </a:p>
-          <a:p>
-            <a:pPr>
-              <a:spcAft>
-                <a:spcPts val="600"/>
-              </a:spcAft>
-            </a:pPr>
-            <a:r>
-              <a:rPr sz="1500">
-                <a:solidFill>
-                  <a:srgbClr val="22282E"/>
-                </a:solidFill>
-              </a:rPr>
-              <a:t>•  Extrae con r2pipe todas las llamadas a strcmp.</a:t>
-            </a:r>
-          </a:p>
-          <a:p>
-            <a:pPr>
-              <a:spcAft>
-                <a:spcPts val="600"/>
-              </a:spcAft>
-            </a:pPr>
-            <a:r>
-              <a:rPr sz="1500">
-                <a:solidFill>
-                  <a:srgbClr val="22282E"/>
-                </a:solidFill>
-              </a:rPr>
-              <a:t>•  Navega el CFG en VV e identifica el bloque de "éxito".</a:t>
-            </a:r>
-          </a:p>
-          <a:p>
-            <a:pPr>
-              <a:spcAft>
-                <a:spcPts val="600"/>
-              </a:spcAft>
-            </a:pPr>
-            <a:r>
-              <a:rPr sz="1500">
-                <a:solidFill>
-                  <a:srgbClr val="22282E"/>
-                </a:solidFill>
-              </a:rPr>
-              <a:t>•  Exporta el análisis a un proyecto de r2 (Ps).</a:t>
+              <a:t>•  Abre el crackme en radare2 y analiza:</a:t>
+            </a:r>
+          </a:p>
+          <a:p>
+            <a:pPr>
+              <a:spcAft>
+                <a:spcPts val="600"/>
+              </a:spcAft>
+            </a:pPr>
+            <a:r>
+              <a:rPr sz="1500">
+                <a:solidFill>
+                  <a:srgbClr val="22282E"/>
+                </a:solidFill>
+              </a:rPr>
+              <a:t>•  Renombra y comenta en r2:</a:t>
+            </a:r>
+          </a:p>
+          <a:p>
+            <a:pPr>
+              <a:spcAft>
+                <a:spcPts val="600"/>
+              </a:spcAft>
+            </a:pPr>
+            <a:r>
+              <a:rPr sz="1500">
+                <a:solidFill>
+                  <a:srgbClr val="22282E"/>
+                </a:solidFill>
+              </a:rPr>
+              <a:t>•  Busca cadenas y sus xrefs:</a:t>
+            </a:r>
+          </a:p>
+          <a:p>
+            <a:pPr>
+              <a:spcAft>
+                <a:spcPts val="600"/>
+              </a:spcAft>
+            </a:pPr>
+            <a:r>
+              <a:rPr sz="1500">
+                <a:solidFill>
+                  <a:srgbClr val="22282E"/>
+                </a:solidFill>
+              </a:rPr>
+              <a:t>•  Si tienes IDA Free/Cutter, abre el mismo binario, ejecuta el análisis y compara la vista de grafo y</a:t>
+            </a:r>
+          </a:p>
+          <a:p>
+            <a:pPr>
+              <a:spcAft>
+                <a:spcPts val="600"/>
+              </a:spcAft>
+            </a:pPr>
+            <a:r>
+              <a:rPr sz="1500">
+                <a:solidFill>
+                  <a:srgbClr val="22282E"/>
+                </a:solidFill>
+              </a:rPr>
+              <a:t>•  el pseudo-C con lo que viste en r2.</a:t>
+            </a:r>
+          </a:p>
+          <a:p>
+            <a:pPr>
+              <a:spcAft>
+                <a:spcPts val="600"/>
+              </a:spcAft>
+            </a:pPr>
+            <a:r>
+              <a:rPr sz="1500">
+                <a:solidFill>
+                  <a:srgbClr val="22282E"/>
+                </a:solidFill>
+              </a:rPr>
+              <a:t>•  Deduce la clave válida en cualquiera de las dos y verifícala ejecutando el binario.</a:t>
+            </a:r>
+          </a:p>
+          <a:p>
+            <a:pPr>
+              <a:spcAft>
+                <a:spcPts val="600"/>
+              </a:spcAft>
+            </a:pPr>
+            <a:r>
+              <a:rPr sz="1500">
+                <a:solidFill>
+                  <a:srgbClr val="22282E"/>
+                </a:solidFill>
+              </a:rPr>
+              <a:t>•  Automatiza con r2pipe: script Python que imprima todas las funciones y sus tamaños:</a:t>
             </a:r>
           </a:p>
         </p:txBody>
@@ -4733,7 +5019,7 @@
                   <a:srgbClr val="0B3D2E"/>
                 </a:solidFill>
               </a:rPr>
-              <a:t>📝 Reto verificable</a:t>
+              <a:t>✍️ Ejercicios</a:t>
             </a:r>
           </a:p>
         </p:txBody>
@@ -4771,37 +5057,82 @@
                   <a:srgbClr val="22282E"/>
                 </a:solidFill>
               </a:rPr>
-              <a:t>•  Analiza un crackme con radare2 (sin GUI) y deduce la clave válida usando solo comandos de r2.</a:t>
-            </a:r>
-          </a:p>
-          <a:p>
-            <a:pPr>
-              <a:spcAft>
-                <a:spcPts val="600"/>
-              </a:spcAft>
-            </a:pPr>
-            <a:r>
-              <a:rPr sz="1500">
-                <a:solidFill>
-                  <a:srgbClr val="22282E"/>
-                </a:solidFill>
-              </a:rPr>
-              <a:t>•  Criterio de aceptación: obtienes la clave correcta trabajando desde la consola de r2 y documentas</a:t>
-            </a:r>
-          </a:p>
-          <a:p>
-            <a:pPr>
-              <a:spcAft>
-                <a:spcPts val="600"/>
-              </a:spcAft>
-            </a:pPr>
-            <a:r>
-              <a:rPr sz="1500">
-                <a:solidFill>
-                  <a:srgbClr val="22282E"/>
-                </a:solidFill>
-              </a:rPr>
-              <a:t>•  los comandos usados (afl, pdf, izz, axt, etc.).</a:t>
+              <a:t>•  Lista y comenta las diferencias de flujo IDA (GUI) vs r2 (REPL).</a:t>
+            </a:r>
+          </a:p>
+          <a:p>
+            <a:pPr>
+              <a:spcAft>
+                <a:spcPts val="600"/>
+              </a:spcAft>
+            </a:pPr>
+            <a:r>
+              <a:rPr sz="1500">
+                <a:solidFill>
+                  <a:srgbClr val="22282E"/>
+                </a:solidFill>
+              </a:rPr>
+              <a:t>•  Usa pdc (pseudo-decompile) de r2 y compáralo con Hex-Rays.</a:t>
+            </a:r>
+          </a:p>
+          <a:p>
+            <a:pPr>
+              <a:spcAft>
+                <a:spcPts val="600"/>
+              </a:spcAft>
+            </a:pPr>
+            <a:r>
+              <a:rPr sz="1500">
+                <a:solidFill>
+                  <a:srgbClr val="22282E"/>
+                </a:solidFill>
+              </a:rPr>
+              <a:t>•  Renombra tres variables en Cutter y en r2 puro.</a:t>
+            </a:r>
+          </a:p>
+          <a:p>
+            <a:pPr>
+              <a:spcAft>
+                <a:spcPts val="600"/>
+              </a:spcAft>
+            </a:pPr>
+            <a:r>
+              <a:rPr sz="1500">
+                <a:solidFill>
+                  <a:srgbClr val="22282E"/>
+                </a:solidFill>
+              </a:rPr>
+              <a:t>•  Extrae con r2pipe todas las llamadas a strcmp.</a:t>
+            </a:r>
+          </a:p>
+          <a:p>
+            <a:pPr>
+              <a:spcAft>
+                <a:spcPts val="600"/>
+              </a:spcAft>
+            </a:pPr>
+            <a:r>
+              <a:rPr sz="1500">
+                <a:solidFill>
+                  <a:srgbClr val="22282E"/>
+                </a:solidFill>
+              </a:rPr>
+              <a:t>•  Navega el CFG en VV e identifica el bloque de "éxito".</a:t>
+            </a:r>
+          </a:p>
+          <a:p>
+            <a:pPr>
+              <a:spcAft>
+                <a:spcPts val="600"/>
+              </a:spcAft>
+            </a:pPr>
+            <a:r>
+              <a:rPr sz="1500">
+                <a:solidFill>
+                  <a:srgbClr val="22282E"/>
+                </a:solidFill>
+              </a:rPr>
+              <a:t>•  Exporta el análisis a un proyecto de r2 (Ps).</a:t>
             </a:r>
           </a:p>
         </p:txBody>
